--- a/Мессенджер Naki.pptx
+++ b/Мессенджер Naki.pptx
@@ -10,16 +10,18 @@
     <p:sldId id="274" r:id="rId4"/>
     <p:sldId id="273" r:id="rId5"/>
     <p:sldId id="258" r:id="rId6"/>
-    <p:sldId id="267" r:id="rId7"/>
-    <p:sldId id="268" r:id="rId8"/>
-    <p:sldId id="265" r:id="rId9"/>
-    <p:sldId id="266" r:id="rId10"/>
-    <p:sldId id="269" r:id="rId11"/>
-    <p:sldId id="259" r:id="rId12"/>
-    <p:sldId id="262" r:id="rId13"/>
-    <p:sldId id="270" r:id="rId14"/>
-    <p:sldId id="263" r:id="rId15"/>
-    <p:sldId id="264" r:id="rId16"/>
+    <p:sldId id="275" r:id="rId7"/>
+    <p:sldId id="267" r:id="rId8"/>
+    <p:sldId id="276" r:id="rId9"/>
+    <p:sldId id="268" r:id="rId10"/>
+    <p:sldId id="265" r:id="rId11"/>
+    <p:sldId id="266" r:id="rId12"/>
+    <p:sldId id="269" r:id="rId13"/>
+    <p:sldId id="259" r:id="rId14"/>
+    <p:sldId id="262" r:id="rId15"/>
+    <p:sldId id="270" r:id="rId16"/>
+    <p:sldId id="263" r:id="rId17"/>
+    <p:sldId id="264" r:id="rId18"/>
   </p:sldIdLst>
   <p:sldSz cx="12192000" cy="6858000"/>
   <p:notesSz cx="6858000" cy="9144000"/>
@@ -273,7 +275,7 @@
           <a:p>
             <a:fld id="{8A1AF4FE-3ABE-4D79-BD55-1C23135AD9DB}" type="datetimeFigureOut">
               <a:rPr lang="ru-RU" smtClean="0"/>
-              <a:t>12.02.2026</a:t>
+              <a:t>18.02.2026</a:t>
             </a:fld>
             <a:endParaRPr lang="ru-RU"/>
           </a:p>
@@ -471,7 +473,7 @@
           <a:p>
             <a:fld id="{8A1AF4FE-3ABE-4D79-BD55-1C23135AD9DB}" type="datetimeFigureOut">
               <a:rPr lang="ru-RU" smtClean="0"/>
-              <a:t>12.02.2026</a:t>
+              <a:t>18.02.2026</a:t>
             </a:fld>
             <a:endParaRPr lang="ru-RU"/>
           </a:p>
@@ -679,7 +681,7 @@
           <a:p>
             <a:fld id="{8A1AF4FE-3ABE-4D79-BD55-1C23135AD9DB}" type="datetimeFigureOut">
               <a:rPr lang="ru-RU" smtClean="0"/>
-              <a:t>12.02.2026</a:t>
+              <a:t>18.02.2026</a:t>
             </a:fld>
             <a:endParaRPr lang="ru-RU"/>
           </a:p>
@@ -877,7 +879,7 @@
           <a:p>
             <a:fld id="{8A1AF4FE-3ABE-4D79-BD55-1C23135AD9DB}" type="datetimeFigureOut">
               <a:rPr lang="ru-RU" smtClean="0"/>
-              <a:t>12.02.2026</a:t>
+              <a:t>18.02.2026</a:t>
             </a:fld>
             <a:endParaRPr lang="ru-RU"/>
           </a:p>
@@ -1152,7 +1154,7 @@
           <a:p>
             <a:fld id="{8A1AF4FE-3ABE-4D79-BD55-1C23135AD9DB}" type="datetimeFigureOut">
               <a:rPr lang="ru-RU" smtClean="0"/>
-              <a:t>12.02.2026</a:t>
+              <a:t>18.02.2026</a:t>
             </a:fld>
             <a:endParaRPr lang="ru-RU"/>
           </a:p>
@@ -1417,7 +1419,7 @@
           <a:p>
             <a:fld id="{8A1AF4FE-3ABE-4D79-BD55-1C23135AD9DB}" type="datetimeFigureOut">
               <a:rPr lang="ru-RU" smtClean="0"/>
-              <a:t>12.02.2026</a:t>
+              <a:t>18.02.2026</a:t>
             </a:fld>
             <a:endParaRPr lang="ru-RU"/>
           </a:p>
@@ -1829,7 +1831,7 @@
           <a:p>
             <a:fld id="{8A1AF4FE-3ABE-4D79-BD55-1C23135AD9DB}" type="datetimeFigureOut">
               <a:rPr lang="ru-RU" smtClean="0"/>
-              <a:t>12.02.2026</a:t>
+              <a:t>18.02.2026</a:t>
             </a:fld>
             <a:endParaRPr lang="ru-RU"/>
           </a:p>
@@ -1970,7 +1972,7 @@
           <a:p>
             <a:fld id="{8A1AF4FE-3ABE-4D79-BD55-1C23135AD9DB}" type="datetimeFigureOut">
               <a:rPr lang="ru-RU" smtClean="0"/>
-              <a:t>12.02.2026</a:t>
+              <a:t>18.02.2026</a:t>
             </a:fld>
             <a:endParaRPr lang="ru-RU"/>
           </a:p>
@@ -2083,7 +2085,7 @@
           <a:p>
             <a:fld id="{8A1AF4FE-3ABE-4D79-BD55-1C23135AD9DB}" type="datetimeFigureOut">
               <a:rPr lang="ru-RU" smtClean="0"/>
-              <a:t>12.02.2026</a:t>
+              <a:t>18.02.2026</a:t>
             </a:fld>
             <a:endParaRPr lang="ru-RU"/>
           </a:p>
@@ -2394,7 +2396,7 @@
           <a:p>
             <a:fld id="{8A1AF4FE-3ABE-4D79-BD55-1C23135AD9DB}" type="datetimeFigureOut">
               <a:rPr lang="ru-RU" smtClean="0"/>
-              <a:t>12.02.2026</a:t>
+              <a:t>18.02.2026</a:t>
             </a:fld>
             <a:endParaRPr lang="ru-RU"/>
           </a:p>
@@ -2682,7 +2684,7 @@
           <a:p>
             <a:fld id="{8A1AF4FE-3ABE-4D79-BD55-1C23135AD9DB}" type="datetimeFigureOut">
               <a:rPr lang="ru-RU" smtClean="0"/>
-              <a:t>12.02.2026</a:t>
+              <a:t>18.02.2026</a:t>
             </a:fld>
             <a:endParaRPr lang="ru-RU"/>
           </a:p>
@@ -2923,7 +2925,7 @@
           <a:p>
             <a:fld id="{8A1AF4FE-3ABE-4D79-BD55-1C23135AD9DB}" type="datetimeFigureOut">
               <a:rPr lang="ru-RU" smtClean="0"/>
-              <a:t>12.02.2026</a:t>
+              <a:t>18.02.2026</a:t>
             </a:fld>
             <a:endParaRPr lang="ru-RU"/>
           </a:p>
@@ -3930,6 +3932,172 @@
       </p:grpSpPr>
       <p:pic>
         <p:nvPicPr>
+          <p:cNvPr id="5" name="Объект 4">
+            <a:extLst>
+              <a:ext uri="{FF2B5EF4-FFF2-40B4-BE49-F238E27FC236}">
+                <a16:creationId xmlns:a16="http://schemas.microsoft.com/office/drawing/2014/main" id="{86AD16D7-D6BF-4072-9086-C9279E7789ED}"/>
+              </a:ext>
+            </a:extLst>
+          </p:cNvPr>
+          <p:cNvPicPr>
+            <a:picLocks noGrp="1" noChangeAspect="1"/>
+          </p:cNvPicPr>
+          <p:nvPr>
+            <p:ph idx="1"/>
+          </p:nvPr>
+        </p:nvPicPr>
+        <p:blipFill rotWithShape="1">
+          <a:blip r:embed="rId2"/>
+          <a:srcRect t="1123"/>
+          <a:stretch/>
+        </p:blipFill>
+        <p:spPr>
+          <a:xfrm>
+            <a:off x="250053" y="386600"/>
+            <a:ext cx="11691894" cy="6084799"/>
+          </a:xfrm>
+        </p:spPr>
+      </p:pic>
+    </p:spTree>
+    <p:extLst>
+      <p:ext uri="{BB962C8B-B14F-4D97-AF65-F5344CB8AC3E}">
+        <p14:creationId xmlns:p14="http://schemas.microsoft.com/office/powerpoint/2010/main" val="2924927354"/>
+      </p:ext>
+    </p:extLst>
+  </p:cSld>
+  <p:clrMapOvr>
+    <a:masterClrMapping/>
+  </p:clrMapOvr>
+</p:sld>
+</file>
+
+<file path=ppt/slides/slide11.xml><?xml version="1.0" encoding="utf-8"?>
+<p:sld xmlns:a="http://schemas.openxmlformats.org/drawingml/2006/main" xmlns:r="http://schemas.openxmlformats.org/officeDocument/2006/relationships" xmlns:p="http://schemas.openxmlformats.org/presentationml/2006/main">
+  <p:cSld>
+    <p:spTree>
+      <p:nvGrpSpPr>
+        <p:cNvPr id="1" name=""/>
+        <p:cNvGrpSpPr/>
+        <p:nvPr/>
+      </p:nvGrpSpPr>
+      <p:grpSpPr>
+        <a:xfrm>
+          <a:off x="0" y="0"/>
+          <a:ext cx="0" cy="0"/>
+          <a:chOff x="0" y="0"/>
+          <a:chExt cx="0" cy="0"/>
+        </a:xfrm>
+      </p:grpSpPr>
+      <p:pic>
+        <p:nvPicPr>
+          <p:cNvPr id="5" name="Объект 4">
+            <a:extLst>
+              <a:ext uri="{FF2B5EF4-FFF2-40B4-BE49-F238E27FC236}">
+                <a16:creationId xmlns:a16="http://schemas.microsoft.com/office/drawing/2014/main" id="{5D8B4F46-79B9-470D-9C1A-D0DE89D529EB}"/>
+              </a:ext>
+            </a:extLst>
+          </p:cNvPr>
+          <p:cNvPicPr>
+            <a:picLocks noGrp="1" noChangeAspect="1"/>
+          </p:cNvPicPr>
+          <p:nvPr>
+            <p:ph idx="1"/>
+          </p:nvPr>
+        </p:nvPicPr>
+        <p:blipFill>
+          <a:blip r:embed="rId2">
+            <a:extLst>
+              <a:ext uri="{28A0092B-C50C-407E-A947-70E740481C1C}">
+                <a14:useLocalDpi xmlns:a14="http://schemas.microsoft.com/office/drawing/2010/main" val="0"/>
+              </a:ext>
+            </a:extLst>
+          </a:blip>
+          <a:stretch>
+            <a:fillRect/>
+          </a:stretch>
+        </p:blipFill>
+        <p:spPr>
+          <a:xfrm>
+            <a:off x="1651201" y="1706560"/>
+            <a:ext cx="8889597" cy="3444880"/>
+          </a:xfrm>
+        </p:spPr>
+      </p:pic>
+      <p:sp>
+        <p:nvSpPr>
+          <p:cNvPr id="4" name="Заголовок 3">
+            <a:extLst>
+              <a:ext uri="{FF2B5EF4-FFF2-40B4-BE49-F238E27FC236}">
+                <a16:creationId xmlns:a16="http://schemas.microsoft.com/office/drawing/2014/main" id="{56239CED-F83E-4522-A408-B541449884DD}"/>
+              </a:ext>
+            </a:extLst>
+          </p:cNvPr>
+          <p:cNvSpPr>
+            <a:spLocks noGrp="1"/>
+          </p:cNvSpPr>
+          <p:nvPr>
+            <p:ph type="title"/>
+          </p:nvPr>
+        </p:nvSpPr>
+        <p:spPr/>
+        <p:txBody>
+          <a:bodyPr>
+            <a:normAutofit/>
+          </a:bodyPr>
+          <a:lstStyle/>
+          <a:p>
+            <a:r>
+              <a:rPr lang="ru-RU" b="1" dirty="0">
+                <a:solidFill>
+                  <a:srgbClr val="0F8B8D"/>
+                </a:solidFill>
+                <a:effectLst/>
+                <a:latin typeface="Nitro"/>
+                <a:ea typeface="Calibri" panose="020F0502020204030204" pitchFamily="34" charset="0"/>
+              </a:rPr>
+              <a:t>Вид зашифрованных сообщений</a:t>
+            </a:r>
+            <a:endParaRPr lang="ru-RU" b="1" dirty="0">
+              <a:solidFill>
+                <a:srgbClr val="0F8B8D"/>
+              </a:solidFill>
+              <a:latin typeface="Nitro"/>
+            </a:endParaRPr>
+          </a:p>
+        </p:txBody>
+      </p:sp>
+    </p:spTree>
+    <p:extLst>
+      <p:ext uri="{BB962C8B-B14F-4D97-AF65-F5344CB8AC3E}">
+        <p14:creationId xmlns:p14="http://schemas.microsoft.com/office/powerpoint/2010/main" val="969218937"/>
+      </p:ext>
+    </p:extLst>
+  </p:cSld>
+  <p:clrMapOvr>
+    <a:masterClrMapping/>
+  </p:clrMapOvr>
+</p:sld>
+</file>
+
+<file path=ppt/slides/slide12.xml><?xml version="1.0" encoding="utf-8"?>
+<p:sld xmlns:a="http://schemas.openxmlformats.org/drawingml/2006/main" xmlns:r="http://schemas.openxmlformats.org/officeDocument/2006/relationships" xmlns:p="http://schemas.openxmlformats.org/presentationml/2006/main">
+  <p:cSld>
+    <p:spTree>
+      <p:nvGrpSpPr>
+        <p:cNvPr id="1" name=""/>
+        <p:cNvGrpSpPr/>
+        <p:nvPr/>
+      </p:nvGrpSpPr>
+      <p:grpSpPr>
+        <a:xfrm>
+          <a:off x="0" y="0"/>
+          <a:ext cx="0" cy="0"/>
+          <a:chOff x="0" y="0"/>
+          <a:chExt cx="0" cy="0"/>
+        </a:xfrm>
+      </p:grpSpPr>
+      <p:pic>
+        <p:nvPicPr>
           <p:cNvPr id="5" name="Рисунок 4">
             <a:extLst>
               <a:ext uri="{FF2B5EF4-FFF2-40B4-BE49-F238E27FC236}">
@@ -4044,7 +4212,7 @@
 </p:sld>
 </file>
 
-<file path=ppt/slides/slide11.xml><?xml version="1.0" encoding="utf-8"?>
+<file path=ppt/slides/slide13.xml><?xml version="1.0" encoding="utf-8"?>
 <p:sld xmlns:a="http://schemas.openxmlformats.org/drawingml/2006/main" xmlns:r="http://schemas.openxmlformats.org/officeDocument/2006/relationships" xmlns:p="http://schemas.openxmlformats.org/presentationml/2006/main">
   <p:cSld>
     <p:spTree>
@@ -4557,7 +4725,7 @@
 </p:sld>
 </file>
 
-<file path=ppt/slides/slide12.xml><?xml version="1.0" encoding="utf-8"?>
+<file path=ppt/slides/slide14.xml><?xml version="1.0" encoding="utf-8"?>
 <p:sld xmlns:a="http://schemas.openxmlformats.org/drawingml/2006/main" xmlns:r="http://schemas.openxmlformats.org/officeDocument/2006/relationships" xmlns:p="http://schemas.openxmlformats.org/presentationml/2006/main">
   <p:cSld>
     <p:spTree>
@@ -5089,7 +5257,7 @@
 </p:sld>
 </file>
 
-<file path=ppt/slides/slide13.xml><?xml version="1.0" encoding="utf-8"?>
+<file path=ppt/slides/slide15.xml><?xml version="1.0" encoding="utf-8"?>
 <p:sld xmlns:a="http://schemas.openxmlformats.org/drawingml/2006/main" xmlns:r="http://schemas.openxmlformats.org/officeDocument/2006/relationships" xmlns:p="http://schemas.openxmlformats.org/presentationml/2006/main">
   <p:cSld>
     <p:spTree>
@@ -5601,7 +5769,7 @@
 </p:sld>
 </file>
 
-<file path=ppt/slides/slide14.xml><?xml version="1.0" encoding="utf-8"?>
+<file path=ppt/slides/slide16.xml><?xml version="1.0" encoding="utf-8"?>
 <p:sld xmlns:a="http://schemas.openxmlformats.org/drawingml/2006/main" xmlns:r="http://schemas.openxmlformats.org/officeDocument/2006/relationships" xmlns:p="http://schemas.openxmlformats.org/presentationml/2006/main">
   <p:cSld>
     <p:spTree>
@@ -5817,7 +5985,7 @@
 </p:sld>
 </file>
 
-<file path=ppt/slides/slide15.xml><?xml version="1.0" encoding="utf-8"?>
+<file path=ppt/slides/slide17.xml><?xml version="1.0" encoding="utf-8"?>
 <p:sld xmlns:a="http://schemas.openxmlformats.org/drawingml/2006/main" xmlns:r="http://schemas.openxmlformats.org/officeDocument/2006/relationships" xmlns:p="http://schemas.openxmlformats.org/presentationml/2006/main">
   <p:cSld>
     <p:spTree>
@@ -7570,7 +7738,7 @@
           <p:cNvPr id="2" name="Заголовок 1">
             <a:extLst>
               <a:ext uri="{FF2B5EF4-FFF2-40B4-BE49-F238E27FC236}">
-                <a16:creationId xmlns:a16="http://schemas.microsoft.com/office/drawing/2014/main" id="{A89D66D1-0715-45B2-AAD3-060AD0A1310C}"/>
+                <a16:creationId xmlns:a16="http://schemas.microsoft.com/office/drawing/2014/main" id="{5DFB8684-625A-405F-9332-04904C56D917}"/>
               </a:ext>
             </a:extLst>
           </p:cNvPr>
@@ -7593,17 +7761,35 @@
                 </a:solidFill>
                 <a:latin typeface="Nitro"/>
               </a:rPr>
-              <a:t>Шифрование сообщений</a:t>
+              <a:t>Как работает </a:t>
+            </a:r>
+            <a:r>
+              <a:rPr lang="en-US" b="1" dirty="0">
+                <a:solidFill>
+                  <a:srgbClr val="0F8B8D"/>
+                </a:solidFill>
+                <a:latin typeface="Nitro"/>
+              </a:rPr>
+              <a:t>ECDH</a:t>
+            </a:r>
+            <a:r>
+              <a:rPr lang="ru-RU" b="1" dirty="0">
+                <a:solidFill>
+                  <a:srgbClr val="0F8B8D"/>
+                </a:solidFill>
+                <a:latin typeface="Nitro"/>
+              </a:rPr>
+              <a:t>?</a:t>
             </a:r>
           </a:p>
         </p:txBody>
       </p:sp>
       <p:pic>
         <p:nvPicPr>
-          <p:cNvPr id="15" name="Объект 14">
-            <a:extLst>
-              <a:ext uri="{FF2B5EF4-FFF2-40B4-BE49-F238E27FC236}">
-                <a16:creationId xmlns:a16="http://schemas.microsoft.com/office/drawing/2014/main" id="{31190EE5-475E-4FA9-8BF3-9AC5A129D351}"/>
+          <p:cNvPr id="9" name="Объект 8">
+            <a:extLst>
+              <a:ext uri="{FF2B5EF4-FFF2-40B4-BE49-F238E27FC236}">
+                <a16:creationId xmlns:a16="http://schemas.microsoft.com/office/drawing/2014/main" id="{516F5488-7C69-49FE-859D-C780CA17D799}"/>
               </a:ext>
             </a:extLst>
           </p:cNvPr>
@@ -7628,15 +7814,15 @@
         </p:blipFill>
         <p:spPr>
           <a:xfrm>
-            <a:off x="1938055" y="1690688"/>
-            <a:ext cx="8315890" cy="4351338"/>
+            <a:off x="1754109" y="1515585"/>
+            <a:ext cx="8683782" cy="4977290"/>
           </a:xfrm>
         </p:spPr>
       </p:pic>
     </p:spTree>
     <p:extLst>
       <p:ext uri="{BB962C8B-B14F-4D97-AF65-F5344CB8AC3E}">
-        <p14:creationId xmlns:p14="http://schemas.microsoft.com/office/powerpoint/2010/main" val="396763482"/>
+        <p14:creationId xmlns:p14="http://schemas.microsoft.com/office/powerpoint/2010/main" val="3378537684"/>
       </p:ext>
     </p:extLst>
   </p:cSld>
@@ -7663,101 +7849,78 @@
           <a:chExt cx="0" cy="0"/>
         </a:xfrm>
       </p:grpSpPr>
+      <p:sp>
+        <p:nvSpPr>
+          <p:cNvPr id="2" name="Заголовок 1">
+            <a:extLst>
+              <a:ext uri="{FF2B5EF4-FFF2-40B4-BE49-F238E27FC236}">
+                <a16:creationId xmlns:a16="http://schemas.microsoft.com/office/drawing/2014/main" id="{A89D66D1-0715-45B2-AAD3-060AD0A1310C}"/>
+              </a:ext>
+            </a:extLst>
+          </p:cNvPr>
+          <p:cNvSpPr>
+            <a:spLocks noGrp="1"/>
+          </p:cNvSpPr>
+          <p:nvPr>
+            <p:ph type="title"/>
+          </p:nvPr>
+        </p:nvSpPr>
+        <p:spPr/>
+        <p:txBody>
+          <a:bodyPr/>
+          <a:lstStyle/>
+          <a:p>
+            <a:r>
+              <a:rPr lang="ru-RU" b="1" dirty="0">
+                <a:solidFill>
+                  <a:srgbClr val="0F8B8D"/>
+                </a:solidFill>
+                <a:latin typeface="Nitro"/>
+              </a:rPr>
+              <a:t>Работа логики мессенджера</a:t>
+            </a:r>
+          </a:p>
+        </p:txBody>
+      </p:sp>
       <p:pic>
         <p:nvPicPr>
-          <p:cNvPr id="5" name="Рисунок 4">
-            <a:extLst>
-              <a:ext uri="{FF2B5EF4-FFF2-40B4-BE49-F238E27FC236}">
-                <a16:creationId xmlns:a16="http://schemas.microsoft.com/office/drawing/2014/main" id="{44F882AB-839B-4304-8441-5D9013D18DFA}"/>
+          <p:cNvPr id="6" name="Объект 5">
+            <a:extLst>
+              <a:ext uri="{FF2B5EF4-FFF2-40B4-BE49-F238E27FC236}">
+                <a16:creationId xmlns:a16="http://schemas.microsoft.com/office/drawing/2014/main" id="{A439842D-AB01-4FEB-AF27-B12E115DECCF}"/>
               </a:ext>
             </a:extLst>
           </p:cNvPr>
           <p:cNvPicPr>
-            <a:picLocks noChangeAspect="1"/>
+            <a:picLocks noGrp="1" noChangeAspect="1"/>
           </p:cNvPicPr>
-          <p:nvPr/>
+          <p:nvPr>
+            <p:ph idx="1"/>
+          </p:nvPr>
         </p:nvPicPr>
         <p:blipFill>
-          <a:blip r:embed="rId2"/>
+          <a:blip r:embed="rId2">
+            <a:extLst>
+              <a:ext uri="{28A0092B-C50C-407E-A947-70E740481C1C}">
+                <a14:useLocalDpi xmlns:a14="http://schemas.microsoft.com/office/drawing/2010/main" val="0"/>
+              </a:ext>
+            </a:extLst>
+          </a:blip>
           <a:stretch>
             <a:fillRect/>
           </a:stretch>
         </p:blipFill>
         <p:spPr>
           <a:xfrm>
-            <a:off x="0" y="496522"/>
-            <a:ext cx="12192000" cy="5864956"/>
+            <a:off x="1361616" y="1515291"/>
+            <a:ext cx="8892329" cy="4652963"/>
           </a:xfrm>
-          <a:prstGeom prst="rect">
-            <a:avLst/>
-          </a:prstGeom>
         </p:spPr>
       </p:pic>
-      <p:sp>
-        <p:nvSpPr>
-          <p:cNvPr id="2" name="Заголовок 1">
-            <a:extLst>
-              <a:ext uri="{FF2B5EF4-FFF2-40B4-BE49-F238E27FC236}">
-                <a16:creationId xmlns:a16="http://schemas.microsoft.com/office/drawing/2014/main" id="{23826193-A27C-4EA5-9FA5-12CBCC55A661}"/>
-              </a:ext>
-            </a:extLst>
-          </p:cNvPr>
-          <p:cNvSpPr>
-            <a:spLocks noGrp="1"/>
-          </p:cNvSpPr>
-          <p:nvPr>
-            <p:ph type="title"/>
-          </p:nvPr>
-        </p:nvSpPr>
-        <p:spPr/>
-        <p:txBody>
-          <a:bodyPr/>
-          <a:lstStyle/>
-          <a:p>
-            <a:r>
-              <a:rPr lang="ru-RU" b="1" dirty="0">
-                <a:solidFill>
-                  <a:srgbClr val="0F8B8D"/>
-                </a:solidFill>
-                <a:latin typeface="Nitro"/>
-              </a:rPr>
-              <a:t>Экран аутентификации</a:t>
-            </a:r>
-          </a:p>
-        </p:txBody>
-      </p:sp>
-      <p:sp>
-        <p:nvSpPr>
-          <p:cNvPr id="3" name="Объект 2">
-            <a:extLst>
-              <a:ext uri="{FF2B5EF4-FFF2-40B4-BE49-F238E27FC236}">
-                <a16:creationId xmlns:a16="http://schemas.microsoft.com/office/drawing/2014/main" id="{A132BF6F-16A8-49B4-973F-79636197B093}"/>
-              </a:ext>
-            </a:extLst>
-          </p:cNvPr>
-          <p:cNvSpPr>
-            <a:spLocks noGrp="1"/>
-          </p:cNvSpPr>
-          <p:nvPr>
-            <p:ph idx="1"/>
-          </p:nvPr>
-        </p:nvSpPr>
-        <p:spPr/>
-        <p:txBody>
-          <a:bodyPr/>
-          <a:lstStyle/>
-          <a:p>
-            <a:pPr marL="0" indent="0">
-              <a:buNone/>
-            </a:pPr>
-            <a:endParaRPr lang="ru-RU" dirty="0"/>
-          </a:p>
-        </p:txBody>
-      </p:sp>
     </p:spTree>
     <p:extLst>
       <p:ext uri="{BB962C8B-B14F-4D97-AF65-F5344CB8AC3E}">
-        <p14:creationId xmlns:p14="http://schemas.microsoft.com/office/powerpoint/2010/main" val="3325232728"/>
+        <p14:creationId xmlns:p14="http://schemas.microsoft.com/office/powerpoint/2010/main" val="396763482"/>
       </p:ext>
     </p:extLst>
   </p:cSld>
@@ -7784,12 +7947,45 @@
           <a:chExt cx="0" cy="0"/>
         </a:xfrm>
       </p:grpSpPr>
+      <p:sp>
+        <p:nvSpPr>
+          <p:cNvPr id="2" name="Заголовок 1">
+            <a:extLst>
+              <a:ext uri="{FF2B5EF4-FFF2-40B4-BE49-F238E27FC236}">
+                <a16:creationId xmlns:a16="http://schemas.microsoft.com/office/drawing/2014/main" id="{0A422E75-4615-4BB2-BB0C-AD21F8050CB5}"/>
+              </a:ext>
+            </a:extLst>
+          </p:cNvPr>
+          <p:cNvSpPr>
+            <a:spLocks noGrp="1"/>
+          </p:cNvSpPr>
+          <p:nvPr>
+            <p:ph type="title"/>
+          </p:nvPr>
+        </p:nvSpPr>
+        <p:spPr/>
+        <p:txBody>
+          <a:bodyPr/>
+          <a:lstStyle/>
+          <a:p>
+            <a:r>
+              <a:rPr lang="ru-RU" b="1" dirty="0">
+                <a:solidFill>
+                  <a:srgbClr val="0F8B8D"/>
+                </a:solidFill>
+                <a:latin typeface="Nitro"/>
+              </a:rPr>
+              <a:t>Общая архитектура приложения</a:t>
+            </a:r>
+          </a:p>
+        </p:txBody>
+      </p:sp>
       <p:pic>
         <p:nvPicPr>
-          <p:cNvPr id="5" name="Объект 4">
-            <a:extLst>
-              <a:ext uri="{FF2B5EF4-FFF2-40B4-BE49-F238E27FC236}">
-                <a16:creationId xmlns:a16="http://schemas.microsoft.com/office/drawing/2014/main" id="{86AD16D7-D6BF-4072-9086-C9279E7789ED}"/>
+          <p:cNvPr id="13" name="Объект 12">
+            <a:extLst>
+              <a:ext uri="{FF2B5EF4-FFF2-40B4-BE49-F238E27FC236}">
+                <a16:creationId xmlns:a16="http://schemas.microsoft.com/office/drawing/2014/main" id="{679174D7-C992-4C17-840E-570692E6B038}"/>
               </a:ext>
             </a:extLst>
           </p:cNvPr>
@@ -7800,22 +7996,29 @@
             <p:ph idx="1"/>
           </p:nvPr>
         </p:nvPicPr>
-        <p:blipFill rotWithShape="1">
-          <a:blip r:embed="rId2"/>
-          <a:srcRect t="1123"/>
-          <a:stretch/>
+        <p:blipFill>
+          <a:blip r:embed="rId2">
+            <a:extLst>
+              <a:ext uri="{28A0092B-C50C-407E-A947-70E740481C1C}">
+                <a14:useLocalDpi xmlns:a14="http://schemas.microsoft.com/office/drawing/2010/main" val="0"/>
+              </a:ext>
+            </a:extLst>
+          </a:blip>
+          <a:stretch>
+            <a:fillRect/>
+          </a:stretch>
         </p:blipFill>
         <p:spPr>
           <a:xfrm>
-            <a:off x="250053" y="386600"/>
-            <a:ext cx="11691894" cy="6084799"/>
+            <a:off x="1549910" y="1559486"/>
+            <a:ext cx="9092179" cy="4721980"/>
           </a:xfrm>
         </p:spPr>
       </p:pic>
     </p:spTree>
     <p:extLst>
       <p:ext uri="{BB962C8B-B14F-4D97-AF65-F5344CB8AC3E}">
-        <p14:creationId xmlns:p14="http://schemas.microsoft.com/office/powerpoint/2010/main" val="2924927354"/>
+        <p14:creationId xmlns:p14="http://schemas.microsoft.com/office/powerpoint/2010/main" val="3957046980"/>
       </p:ext>
     </p:extLst>
   </p:cSld>
@@ -7844,45 +8047,40 @@
       </p:grpSpPr>
       <p:pic>
         <p:nvPicPr>
-          <p:cNvPr id="5" name="Объект 4">
-            <a:extLst>
-              <a:ext uri="{FF2B5EF4-FFF2-40B4-BE49-F238E27FC236}">
-                <a16:creationId xmlns:a16="http://schemas.microsoft.com/office/drawing/2014/main" id="{5D8B4F46-79B9-470D-9C1A-D0DE89D529EB}"/>
+          <p:cNvPr id="5" name="Рисунок 4">
+            <a:extLst>
+              <a:ext uri="{FF2B5EF4-FFF2-40B4-BE49-F238E27FC236}">
+                <a16:creationId xmlns:a16="http://schemas.microsoft.com/office/drawing/2014/main" id="{44F882AB-839B-4304-8441-5D9013D18DFA}"/>
               </a:ext>
             </a:extLst>
           </p:cNvPr>
           <p:cNvPicPr>
-            <a:picLocks noGrp="1" noChangeAspect="1"/>
+            <a:picLocks noChangeAspect="1"/>
           </p:cNvPicPr>
-          <p:nvPr>
-            <p:ph idx="1"/>
-          </p:nvPr>
+          <p:nvPr/>
         </p:nvPicPr>
         <p:blipFill>
-          <a:blip r:embed="rId2">
-            <a:extLst>
-              <a:ext uri="{28A0092B-C50C-407E-A947-70E740481C1C}">
-                <a14:useLocalDpi xmlns:a14="http://schemas.microsoft.com/office/drawing/2010/main" val="0"/>
-              </a:ext>
-            </a:extLst>
-          </a:blip>
+          <a:blip r:embed="rId2"/>
           <a:stretch>
             <a:fillRect/>
           </a:stretch>
         </p:blipFill>
         <p:spPr>
           <a:xfrm>
-            <a:off x="1651201" y="1706560"/>
-            <a:ext cx="8889597" cy="3444880"/>
+            <a:off x="0" y="496522"/>
+            <a:ext cx="12192000" cy="5864956"/>
           </a:xfrm>
+          <a:prstGeom prst="rect">
+            <a:avLst/>
+          </a:prstGeom>
         </p:spPr>
       </p:pic>
       <p:sp>
         <p:nvSpPr>
-          <p:cNvPr id="4" name="Заголовок 3">
-            <a:extLst>
-              <a:ext uri="{FF2B5EF4-FFF2-40B4-BE49-F238E27FC236}">
-                <a16:creationId xmlns:a16="http://schemas.microsoft.com/office/drawing/2014/main" id="{56239CED-F83E-4522-A408-B541449884DD}"/>
+          <p:cNvPr id="2" name="Заголовок 1">
+            <a:extLst>
+              <a:ext uri="{FF2B5EF4-FFF2-40B4-BE49-F238E27FC236}">
+                <a16:creationId xmlns:a16="http://schemas.microsoft.com/office/drawing/2014/main" id="{23826193-A27C-4EA5-9FA5-12CBCC55A661}"/>
               </a:ext>
             </a:extLst>
           </p:cNvPr>
@@ -7895,9 +8093,7 @@
         </p:nvSpPr>
         <p:spPr/>
         <p:txBody>
-          <a:bodyPr>
-            <a:normAutofit/>
-          </a:bodyPr>
+          <a:bodyPr/>
           <a:lstStyle/>
           <a:p>
             <a:r>
@@ -7905,25 +8101,45 @@
                 <a:solidFill>
                   <a:srgbClr val="0F8B8D"/>
                 </a:solidFill>
-                <a:effectLst/>
                 <a:latin typeface="Nitro"/>
-                <a:ea typeface="Calibri" panose="020F0502020204030204" pitchFamily="34" charset="0"/>
-              </a:rPr>
-              <a:t>Вид зашифрованных сообщений</a:t>
-            </a:r>
-            <a:endParaRPr lang="ru-RU" b="1" dirty="0">
-              <a:solidFill>
-                <a:srgbClr val="0F8B8D"/>
-              </a:solidFill>
-              <a:latin typeface="Nitro"/>
-            </a:endParaRPr>
+              </a:rPr>
+              <a:t>Вид пользовательского интерфейса</a:t>
+            </a:r>
+          </a:p>
+        </p:txBody>
+      </p:sp>
+      <p:sp>
+        <p:nvSpPr>
+          <p:cNvPr id="3" name="Объект 2">
+            <a:extLst>
+              <a:ext uri="{FF2B5EF4-FFF2-40B4-BE49-F238E27FC236}">
+                <a16:creationId xmlns:a16="http://schemas.microsoft.com/office/drawing/2014/main" id="{A132BF6F-16A8-49B4-973F-79636197B093}"/>
+              </a:ext>
+            </a:extLst>
+          </p:cNvPr>
+          <p:cNvSpPr>
+            <a:spLocks noGrp="1"/>
+          </p:cNvSpPr>
+          <p:nvPr>
+            <p:ph idx="1"/>
+          </p:nvPr>
+        </p:nvSpPr>
+        <p:spPr/>
+        <p:txBody>
+          <a:bodyPr/>
+          <a:lstStyle/>
+          <a:p>
+            <a:pPr marL="0" indent="0">
+              <a:buNone/>
+            </a:pPr>
+            <a:endParaRPr lang="ru-RU" dirty="0"/>
           </a:p>
         </p:txBody>
       </p:sp>
     </p:spTree>
     <p:extLst>
       <p:ext uri="{BB962C8B-B14F-4D97-AF65-F5344CB8AC3E}">
-        <p14:creationId xmlns:p14="http://schemas.microsoft.com/office/powerpoint/2010/main" val="969218937"/>
+        <p14:creationId xmlns:p14="http://schemas.microsoft.com/office/powerpoint/2010/main" val="3325232728"/>
       </p:ext>
     </p:extLst>
   </p:cSld>
